--- a/second_round/promotion_presentation_second_round.pptx
+++ b/second_round/promotion_presentation_second_round.pptx
@@ -4371,7 +4371,7 @@
               </a:defRPr>
             </a:pPr>
             <a:r>
-              <a:t>Change the instructions the AI follows without a software release</a:t>
+              <a:t>Full prompt management. Version, compare side by side, test and publish the AI instructions, with no software release</a:t>
             </a:r>
           </a:p>
           <a:p>
@@ -4636,7 +4636,7 @@
               </a:defRPr>
             </a:pPr>
             <a:r>
-              <a:t>140 people</a:t>
+              <a:t>Presented at RCP level</a:t>
             </a:r>
           </a:p>
           <a:p>
@@ -4649,7 +4649,7 @@
               </a:defRPr>
             </a:pPr>
             <a:r>
-              <a:t>Came to my session on it. Recorded, and still used</a:t>
+              <a:t>140 attended my session. Recorded, and still used</a:t>
             </a:r>
           </a:p>
         </p:txBody>
@@ -4752,7 +4752,7 @@
               </a:defRPr>
             </a:pPr>
             <a:r>
-              <a:t>I taught it to the unit, and the Innovation Office is reviewing it bank-wide. But a platform nobody uses is worth nothing, so I went and used it too. The next two slides are what came out.</a:t>
+              <a:t>Multiple teams across RCP now build on this framework. But a platform nobody uses is worth nothing, so I went and used it too. The next two slides are what came out.</a:t>
             </a:r>
           </a:p>
         </p:txBody>
@@ -4806,7 +4806,7 @@
               </a:defRPr>
             </a:pPr>
             <a:r>
-              <a:t>Live Result: Finding a Client's Senior Managers</a:t>
+              <a:t>Finding the Senior Managers Who Run a Client</a:t>
             </a:r>
           </a:p>
         </p:txBody>
@@ -4842,7 +4842,7 @@
               </a:defRPr>
             </a:pPr>
             <a:r>
-              <a:t>FIRST PRODUCTION AI WORKFLOW IN THE BUSINESS UNIT  |  NAMED IN THE NATIONAL PRESS</a:t>
+              <a:t>FIRST AI WORKFLOW IN PRODUCTION. I DESIGNED IT AND WROTE EVERY PROMPT.  |  ON MY PLATFORM</a:t>
             </a:r>
           </a:p>
         </p:txBody>
@@ -5379,7 +5379,7 @@
               </a:defRPr>
             </a:pPr>
             <a:r>
-              <a:t>One of only three AI applications Deutsche Bank showed the national press, June 2026. Named in The Hindu.</a:t>
+              <a:t>Demonstrated to the national media at the bank's Bank on Tech showcase in Bengaluru, India, June 2026. Covered in the national press.</a:t>
             </a:r>
           </a:p>
         </p:txBody>
@@ -5415,7 +5415,7 @@
               </a:defRPr>
             </a:pPr>
             <a:r>
-              <a:t>Published bank-wide on the internal network, August 2026. Rated 4.6 out of 5 by 66 readers.</a:t>
+              <a:t>Published bank-wide on the internal network, August 2026.</a:t>
             </a:r>
           </a:p>
         </p:txBody>
@@ -5541,7 +5541,7 @@
               </a:defRPr>
             </a:pPr>
             <a:r>
-              <a:t>Live Result: Who Owns and Controls a Client</a:t>
+              <a:t>Finding the Ownership Hierarchy Behind a Client</a:t>
             </a:r>
           </a:p>
         </p:txBody>
@@ -5577,7 +5577,7 @@
               </a:defRPr>
             </a:pPr>
             <a:r>
-              <a:t>SECOND PRODUCTION AI WORKFLOW  |  I OWN THIS ONE END TO END  |  LIVE FOR 100 USERS</a:t>
+              <a:t>THE HARDER ONE. I OWN IT END TO END.  |  SECOND AI WORKFLOW IN PRODUCTION  |  LIVE FOR 100 USERS</a:t>
             </a:r>
           </a:p>
         </p:txBody>
@@ -5954,7 +5954,7 @@
               </a:defRPr>
             </a:pPr>
             <a:r>
-              <a:t>256 automated tests</a:t>
+              <a:t>265 automated tests</a:t>
             </a:r>
           </a:p>
           <a:p>
@@ -6358,7 +6358,7 @@
               </a:defRPr>
             </a:pPr>
             <a:r>
-              <a:t>The Foundations Underneath</a:t>
+              <a:t>What Both of Those Workflows Stand On</a:t>
             </a:r>
           </a:p>
         </p:txBody>
@@ -6394,7 +6394,7 @@
               </a:defRPr>
             </a:pPr>
             <a:r>
-              <a:t>DESIGNED, BUILT AND STILL OWNED IN PRODUCTION</a:t>
+              <a:t>DOCUMENTS AND STATE. DESIGNED, BUILT AND STILL OWNED IN PRODUCTION</a:t>
             </a:r>
           </a:p>
         </p:txBody>
@@ -6408,7 +6408,7 @@
         <p:spPr>
           <a:xfrm>
             <a:off x="640080" y="1371600"/>
-            <a:ext cx="5349240" cy="548640"/>
+            <a:ext cx="6858000" cy="548640"/>
           </a:xfrm>
           <a:prstGeom prst="roundRect">
             <a:avLst/>
@@ -6451,7 +6451,7 @@
               </a:defRPr>
             </a:pPr>
             <a:r>
-              <a:t>Messaging Infrastructure</a:t>
+              <a:t>Documents and the State Machine</a:t>
             </a:r>
           </a:p>
         </p:txBody>
@@ -6465,7 +6465,7 @@
         <p:spPr>
           <a:xfrm>
             <a:off x="822960" y="2057400"/>
-            <a:ext cx="5029200" cy="2194560"/>
+            <a:ext cx="6583680" cy="2194560"/>
           </a:xfrm>
           <a:prstGeom prst="rect">
             <a:avLst/>
@@ -6490,7 +6490,7 @@
               </a:defRPr>
             </a:pPr>
             <a:r>
-              <a:t>Could not handle load. Analysts waited 30 to 60 minutes for results</a:t>
+              <a:t>Analysts linked documents to compliance questions by hand. I automated it</a:t>
             </a:r>
           </a:p>
           <a:p>
@@ -6506,7 +6506,7 @@
               </a:defRPr>
             </a:pPr>
             <a:r>
-              <a:t>Messages lost permanently on any outage. Nobody could see where work was stuck</a:t>
+              <a:t>I automated the unlinking too, when a newer document supersedes an older one. A missing document is visible. A stale one still looks current to an auditor</a:t>
             </a:r>
           </a:p>
           <a:p>
@@ -6522,7 +6522,23 @@
               </a:defRPr>
             </a:pPr>
             <a:r>
-              <a:t>I rebuilt it. Automatic recovery, and every message traceable end to end</a:t>
+              <a:t>My state machine works out where every question and every document stands</a:t>
+            </a:r>
+          </a:p>
+          <a:p>
+            <a:pPr>
+              <a:spcBef>
+                <a:spcPts val="800"/>
+              </a:spcBef>
+              <a:defRPr sz="1500" b="0">
+                <a:solidFill>
+                  <a:srgbClr val="333333"/>
+                </a:solidFill>
+                <a:latin typeface="Calibri"/>
+              </a:defRPr>
+            </a:pPr>
+            <a:r>
+              <a:t>Both AI workflows only see work it released, and only trust documents it marked good</a:t>
             </a:r>
           </a:p>
         </p:txBody>
@@ -6535,8 +6551,8 @@
         </p:nvSpPr>
         <p:spPr>
           <a:xfrm>
-            <a:off x="6309360" y="1371600"/>
-            <a:ext cx="5257800" cy="548640"/>
+            <a:off x="7680960" y="1371600"/>
+            <a:ext cx="3886200" cy="548640"/>
           </a:xfrm>
           <a:prstGeom prst="roundRect">
             <a:avLst/>
@@ -6579,7 +6595,7 @@
               </a:defRPr>
             </a:pPr>
             <a:r>
-              <a:t>Documents and Validity</a:t>
+              <a:t>Messaging</a:t>
             </a:r>
           </a:p>
         </p:txBody>
@@ -6592,8 +6608,8 @@
         </p:nvSpPr>
         <p:spPr>
           <a:xfrm>
-            <a:off x="6492240" y="2057400"/>
-            <a:ext cx="4937760" cy="2194560"/>
+            <a:off x="7863840" y="2057400"/>
+            <a:ext cx="3611880" cy="2194560"/>
           </a:xfrm>
           <a:prstGeom prst="rect">
             <a:avLst/>
@@ -6618,7 +6634,7 @@
               </a:defRPr>
             </a:pPr>
             <a:r>
-              <a:t>Analysts linked documents to compliance questions by hand, then rechecked</a:t>
+              <a:t>The old infrastructure could not cope. Analysts waited 30 to 60 minutes</a:t>
             </a:r>
           </a:p>
           <a:p>
@@ -6634,7 +6650,7 @@
               </a:defRPr>
             </a:pPr>
             <a:r>
-              <a:t>I built automatic linking and unlinking, with no human in the loop</a:t>
+              <a:t>I designed a new messaging library, including automatic retry when a message fails</a:t>
             </a:r>
           </a:p>
           <a:p>
@@ -6650,7 +6666,7 @@
               </a:defRPr>
             </a:pPr>
             <a:r>
-              <a:t>Rebuilt the engine that decides whether an answer is still valid</a:t>
+              <a:t>The same work now completes in seconds</a:t>
             </a:r>
           </a:p>
         </p:txBody>
@@ -6696,7 +6712,7 @@
           <a:lstStyle/>
           <a:p>
             <a:pPr algn="ctr">
-              <a:defRPr sz="1800" b="1">
+              <a:defRPr sz="2100" b="1">
                 <a:solidFill>
                   <a:srgbClr val="FFFFFF"/>
                 </a:solidFill>
@@ -6704,7 +6720,7 @@
               </a:defRPr>
             </a:pPr>
             <a:r>
-              <a:t>30-60 min ➔ Seconds</a:t>
+              <a:t>€5 million</a:t>
             </a:r>
           </a:p>
           <a:p>
@@ -6717,7 +6733,7 @@
               </a:defRPr>
             </a:pPr>
             <a:r>
-              <a:t>Analyst wait time</a:t>
+              <a:t>Savings contributed to</a:t>
             </a:r>
           </a:p>
         </p:txBody>
@@ -6771,7 +6787,7 @@
               </a:defRPr>
             </a:pPr>
             <a:r>
-              <a:t>500,000 a day</a:t>
+              <a:t>40,000+</a:t>
             </a:r>
           </a:p>
           <a:p>
@@ -6784,7 +6800,7 @@
               </a:defRPr>
             </a:pPr>
             <a:r>
-              <a:t>Messages processed</a:t>
+              <a:t>Document operations automated</a:t>
             </a:r>
           </a:p>
         </p:txBody>
@@ -6830,7 +6846,7 @@
           <a:lstStyle/>
           <a:p>
             <a:pPr algn="ctr">
-              <a:defRPr sz="2100" b="1">
+              <a:defRPr sz="1800" b="1">
                 <a:solidFill>
                   <a:srgbClr val="FFFFFF"/>
                 </a:solidFill>
@@ -6838,7 +6854,7 @@
               </a:defRPr>
             </a:pPr>
             <a:r>
-              <a:t>€5 million</a:t>
+              <a:t>30-60 min ➔ Seconds</a:t>
             </a:r>
           </a:p>
           <a:p>
@@ -6851,7 +6867,7 @@
               </a:defRPr>
             </a:pPr>
             <a:r>
-              <a:t>Savings contributed to</a:t>
+              <a:t>Analyst wait time</a:t>
             </a:r>
           </a:p>
         </p:txBody>
@@ -6905,7 +6921,7 @@
               </a:defRPr>
             </a:pPr>
             <a:r>
-              <a:t>40,000+</a:t>
+              <a:t>500,000 a day</a:t>
             </a:r>
           </a:p>
           <a:p>
@@ -6918,7 +6934,7 @@
               </a:defRPr>
             </a:pPr>
             <a:r>
-              <a:t>Document operations automated</a:t>
+              <a:t>Messages processed</a:t>
             </a:r>
           </a:p>
         </p:txBody>

--- a/second_round/promotion_presentation_second_round.pptx
+++ b/second_round/promotion_presentation_second_round.pptx
@@ -4355,7 +4355,7 @@
               </a:defRPr>
             </a:pPr>
             <a:r>
-              <a:t>A live picture of every workflow, that lights up as it runs</a:t>
+              <a:t>A real-time picture of every workflow, that lights up as it runs</a:t>
             </a:r>
           </a:p>
           <a:p>
@@ -4703,7 +4703,7 @@
               </a:defRPr>
             </a:pPr>
             <a:r>
-              <a:t>Two live workflows</a:t>
+              <a:t>Two workflows in production</a:t>
             </a:r>
           </a:p>
           <a:p>
@@ -4938,7 +4938,7 @@
               </a:defRPr>
             </a:pPr>
             <a:r>
-              <a:t>Analysts read document after document by hand to find who runs a client</a:t>
+              <a:t>Analysts read every document by hand, one at a time, to find who runs a client</a:t>
             </a:r>
           </a:p>
           <a:p>
@@ -4954,7 +4954,7 @@
               </a:defRPr>
             </a:pPr>
             <a:r>
-              <a:t>Each name checked across several systems, then tested against policy</a:t>
+              <a:t>Each name checked across several systems, duplicates and country rules sorted out by hand</a:t>
             </a:r>
           </a:p>
           <a:p>
@@ -4970,7 +4970,7 @@
               </a:defRPr>
             </a:pPr>
             <a:r>
-              <a:t>77 minutes of manual work per case, and rework between preparers and reviewers</a:t>
+              <a:t>Cases passed back and forth between preparer and reviewer, and records updated by hand</a:t>
             </a:r>
           </a:p>
         </p:txBody>
@@ -5066,7 +5066,7 @@
               </a:defRPr>
             </a:pPr>
             <a:r>
-              <a:t>Agents identify the people, cross-check the records and file the evidence</a:t>
+              <a:t>A team of ten AI agents, reading every document in parallel</a:t>
             </a:r>
           </a:p>
           <a:p>
@@ -5082,7 +5082,7 @@
               </a:defRPr>
             </a:pPr>
             <a:r>
-              <a:t>Analysts still review the evidence and make the final decision</a:t>
+              <a:t>They find the senior managers, merge duplicates and apply country-specific rules</a:t>
             </a:r>
           </a:p>
           <a:p>
@@ -5098,7 +5098,7 @@
               </a:defRPr>
             </a:pPr>
             <a:r>
-              <a:t>Built in five months with Operations, Policy, Data, Controls and Transformation</a:t>
+              <a:t>Checker agents review every step, then results are matched to the client's existing records</a:t>
             </a:r>
           </a:p>
         </p:txBody>
@@ -5541,7 +5541,7 @@
               </a:defRPr>
             </a:pPr>
             <a:r>
-              <a:t>Finding the Ownership Hierarchy Behind a Client</a:t>
+              <a:t>Finding Who Really Owns and Controls a Client</a:t>
             </a:r>
           </a:p>
         </p:txBody>
@@ -5577,7 +5577,7 @@
               </a:defRPr>
             </a:pPr>
             <a:r>
-              <a:t>THE HARDER ONE. I OWN IT END TO END.  |  SECOND AI WORKFLOW IN PRODUCTION  |  LIVE FOR 100 USERS</a:t>
+              <a:t>SECOND AI WORKFLOW IN PRODUCTION. I OWN IT END TO END.  |  ON MY PLATFORM  |  ABOUT 400 USERS</a:t>
             </a:r>
           </a:p>
         </p:txBody>
@@ -5673,7 +5673,7 @@
               </a:defRPr>
             </a:pPr>
             <a:r>
-              <a:t>An analyst traces ownership up through layers of holding companies and trusts</a:t>
+              <a:t>An analyst reads documents in several languages and traces ownership by hand, layer by layer</a:t>
             </a:r>
           </a:p>
           <a:p>
@@ -5689,7 +5689,7 @@
               </a:defRPr>
             </a:pPr>
             <a:r>
-              <a:t>Documents in several languages, group policy plus every country's own rules</a:t>
+              <a:t>Percentages worked out by hand, against group policy and each country's own rules</a:t>
             </a:r>
           </a:p>
           <a:p>
@@ -5705,7 +5705,7 @@
               </a:defRPr>
             </a:pPr>
             <a:r>
-              <a:t>Percentages worked out by hand. Slow, and hard to evidence to a regulator</a:t>
+              <a:t>Conflicting documents and missing evidence, and a wrong owner is a regulatory problem</a:t>
             </a:r>
           </a:p>
         </p:txBody>
@@ -5801,7 +5801,7 @@
               </a:defRPr>
             </a:pPr>
             <a:r>
-              <a:t>One call returns the full structure, with a document quote behind every claim</a:t>
+              <a:t>AI reads every document, in any language, and maps the ownership chart layer by layer</a:t>
             </a:r>
           </a:p>
           <a:p>
@@ -5817,7 +5817,7 @@
               </a:defRPr>
             </a:pPr>
             <a:r>
-              <a:t>Collapsed an earlier six-agent pipeline into a single call</a:t>
+              <a:t>Works out the percentages and identifies the ultimate owners under each country's rules</a:t>
             </a:r>
           </a:p>
           <a:p>
@@ -5833,7 +5833,7 @@
               </a:defRPr>
             </a:pPr>
             <a:r>
-              <a:t>Never guesses. Missing evidence is recorded as a gap, not filled in</a:t>
+              <a:t>Conflicts and gaps flagged, never guessed. Every claim quoted from a document</a:t>
             </a:r>
           </a:p>
         </p:txBody>
@@ -5879,7 +5879,7 @@
           <a:lstStyle/>
           <a:p>
             <a:pPr algn="ctr">
-              <a:defRPr sz="2200" b="1">
+              <a:defRPr sz="2300" b="1">
                 <a:solidFill>
                   <a:srgbClr val="FFFFFF"/>
                 </a:solidFill>
@@ -5887,7 +5887,7 @@
               </a:defRPr>
             </a:pPr>
             <a:r>
-              <a:t>Maker and checker</a:t>
+              <a:t>198 min  ➔  5 to 15</a:t>
             </a:r>
           </a:p>
           <a:p>
@@ -5900,7 +5900,7 @@
               </a:defRPr>
             </a:pPr>
             <a:r>
-              <a:t>A second agent scores every result</a:t>
+              <a:t>Analyst time per case, at least 13 times faster</a:t>
             </a:r>
           </a:p>
         </p:txBody>
@@ -5946,7 +5946,7 @@
           <a:lstStyle/>
           <a:p>
             <a:pPr algn="ctr">
-              <a:defRPr sz="2200" b="1">
+              <a:defRPr sz="2400" b="1">
                 <a:solidFill>
                   <a:srgbClr val="FFFFFF"/>
                 </a:solidFill>
@@ -5954,7 +5954,7 @@
               </a:defRPr>
             </a:pPr>
             <a:r>
-              <a:t>265 automated tests</a:t>
+              <a:t>71 people's work</a:t>
             </a:r>
           </a:p>
           <a:p>
@@ -5967,7 +5967,7 @@
               </a:defRPr>
             </a:pPr>
             <a:r>
-              <a:t>I treat AI instructions as code</a:t>
+              <a:t>Estimated analyst time freed each year</a:t>
             </a:r>
           </a:p>
         </p:txBody>
@@ -6013,7 +6013,7 @@
           <a:lstStyle/>
           <a:p>
             <a:pPr algn="ctr">
-              <a:defRPr sz="2200" b="1">
+              <a:defRPr sz="2600" b="1">
                 <a:solidFill>
                   <a:srgbClr val="FFFFFF"/>
                 </a:solidFill>
@@ -6021,7 +6021,7 @@
               </a:defRPr>
             </a:pPr>
             <a:r>
-              <a:t>Same case, same answer</a:t>
+              <a:t>About 90%</a:t>
             </a:r>
           </a:p>
           <a:p>
@@ -6034,7 +6034,7 @@
               </a:defRPr>
             </a:pPr>
             <a:r>
-              <a:t>Measured it first, then fixed it</a:t>
+              <a:t>Of the clients the bank checks, covered today</a:t>
             </a:r>
           </a:p>
         </p:txBody>
@@ -6048,13 +6048,13 @@
         <p:spPr>
           <a:xfrm>
             <a:off x="640080" y="4983480"/>
-            <a:ext cx="5349240" cy="1554480"/>
+            <a:ext cx="10927080" cy="1188720"/>
           </a:xfrm>
           <a:prstGeom prst="roundRect">
             <a:avLst/>
           </a:prstGeom>
           <a:solidFill>
-            <a:srgbClr val="F5F5F5"/>
+            <a:srgbClr val="E8ECF7"/>
           </a:solidFill>
           <a:ln>
             <a:noFill/>
@@ -6091,8 +6091,8 @@
         </p:nvSpPr>
         <p:spPr>
           <a:xfrm>
-            <a:off x="822960" y="5084064"/>
-            <a:ext cx="5029200" cy="292608"/>
+            <a:off x="868680" y="5084064"/>
+            <a:ext cx="10515600" cy="310896"/>
           </a:xfrm>
           <a:prstGeom prst="rect">
             <a:avLst/>
@@ -6106,7 +6106,7 @@
           <a:lstStyle/>
           <a:p>
             <a:pPr algn="l">
-              <a:defRPr sz="1400" b="1" i="0">
+              <a:defRPr sz="1500" b="1" i="0">
                 <a:solidFill>
                   <a:srgbClr val="001E96"/>
                 </a:solidFill>
@@ -6114,7 +6114,7 @@
               </a:defRPr>
             </a:pPr>
             <a:r>
-              <a:t>Partnership with the policy team</a:t>
+              <a:t>Why it matters to the bank</a:t>
             </a:r>
           </a:p>
         </p:txBody>
@@ -6127,8 +6127,8 @@
         </p:nvSpPr>
         <p:spPr>
           <a:xfrm>
-            <a:off x="822960" y="5394960"/>
-            <a:ext cx="5029200" cy="1051560"/>
+            <a:off x="868680" y="5413248"/>
+            <a:ext cx="10515600" cy="658368"/>
           </a:xfrm>
           <a:prstGeom prst="rect">
             <a:avLst/>
@@ -6141,11 +6141,8 @@
           </a:bodyPr>
           <a:lstStyle/>
           <a:p>
-            <a:pPr>
-              <a:spcBef>
-                <a:spcPts val="500"/>
-              </a:spcBef>
-              <a:defRPr sz="1300" b="0">
+            <a:pPr algn="l">
+              <a:defRPr sz="1500" b="0" i="0">
                 <a:solidFill>
                   <a:srgbClr val="333333"/>
                 </a:solidFill>
@@ -6153,158 +6150,7 @@
               </a:defRPr>
             </a:pPr>
             <a:r>
-              <a:t>Audited their rules clause by clause. Put 15 written questions back</a:t>
-            </a:r>
-          </a:p>
-          <a:p>
-            <a:pPr>
-              <a:spcBef>
-                <a:spcPts val="500"/>
-              </a:spcBef>
-              <a:defRPr sz="1300" b="0">
-                <a:solidFill>
-                  <a:srgbClr val="333333"/>
-                </a:solidFill>
-                <a:latin typeface="Calibri"/>
-              </a:defRPr>
-            </a:pPr>
-            <a:r>
-              <a:t>Told them their own worked examples were wrong. They corrected them</a:t>
-            </a:r>
-          </a:p>
-        </p:txBody>
-      </p:sp>
-      <p:sp>
-        <p:nvSpPr>
-          <p:cNvPr id="14" name="Rounded Rectangle 13"/>
-          <p:cNvSpPr/>
-          <p:nvPr/>
-        </p:nvSpPr>
-        <p:spPr>
-          <a:xfrm>
-            <a:off x="6309360" y="4983480"/>
-            <a:ext cx="5257800" cy="1554480"/>
-          </a:xfrm>
-          <a:prstGeom prst="roundRect">
-            <a:avLst/>
-          </a:prstGeom>
-          <a:solidFill>
-            <a:srgbClr val="F5F5F5"/>
-          </a:solidFill>
-          <a:ln>
-            <a:noFill/>
-          </a:ln>
-          <a:effectLst/>
-        </p:spPr>
-        <p:style>
-          <a:lnRef idx="1">
-            <a:schemeClr val="accent1"/>
-          </a:lnRef>
-          <a:fillRef idx="3">
-            <a:schemeClr val="accent1"/>
-          </a:fillRef>
-          <a:effectRef idx="2">
-            <a:schemeClr val="accent1"/>
-          </a:effectRef>
-          <a:fontRef idx="minor">
-            <a:schemeClr val="lt1"/>
-          </a:fontRef>
-        </p:style>
-        <p:txBody>
-          <a:bodyPr rtlCol="0" anchor="ctr"/>
-          <a:lstStyle/>
-          <a:p>
-            <a:pPr algn="ctr"/>
-          </a:p>
-        </p:txBody>
-      </p:sp>
-      <p:sp>
-        <p:nvSpPr>
-          <p:cNvPr id="15" name="TextBox 14"/>
-          <p:cNvSpPr txBox="1"/>
-          <p:nvPr/>
-        </p:nvSpPr>
-        <p:spPr>
-          <a:xfrm>
-            <a:off x="6492240" y="5084064"/>
-            <a:ext cx="4937760" cy="292608"/>
-          </a:xfrm>
-          <a:prstGeom prst="rect">
-            <a:avLst/>
-          </a:prstGeom>
-          <a:noFill/>
-        </p:spPr>
-        <p:txBody>
-          <a:bodyPr wrap="square">
-            <a:spAutoFit/>
-          </a:bodyPr>
-          <a:lstStyle/>
-          <a:p>
-            <a:pPr algn="l">
-              <a:defRPr sz="1400" b="1" i="0">
-                <a:solidFill>
-                  <a:srgbClr val="001E96"/>
-                </a:solidFill>
-                <a:latin typeface="Calibri"/>
-              </a:defRPr>
-            </a:pPr>
-            <a:r>
-              <a:t>Built for the regulator, not just the user</a:t>
-            </a:r>
-          </a:p>
-        </p:txBody>
-      </p:sp>
-      <p:sp>
-        <p:nvSpPr>
-          <p:cNvPr id="16" name="TextBox 15"/>
-          <p:cNvSpPr txBox="1"/>
-          <p:nvPr/>
-        </p:nvSpPr>
-        <p:spPr>
-          <a:xfrm>
-            <a:off x="6492240" y="5394960"/>
-            <a:ext cx="4937760" cy="1051560"/>
-          </a:xfrm>
-          <a:prstGeom prst="rect">
-            <a:avLst/>
-          </a:prstGeom>
-          <a:noFill/>
-        </p:spPr>
-        <p:txBody>
-          <a:bodyPr wrap="square">
-            <a:spAutoFit/>
-          </a:bodyPr>
-          <a:lstStyle/>
-          <a:p>
-            <a:pPr>
-              <a:spcBef>
-                <a:spcPts val="500"/>
-              </a:spcBef>
-              <a:defRPr sz="1300" b="0">
-                <a:solidFill>
-                  <a:srgbClr val="333333"/>
-                </a:solidFill>
-                <a:latin typeface="Calibri"/>
-              </a:defRPr>
-            </a:pPr>
-            <a:r>
-              <a:t>Every assertion carries a verbatim quote from a document</a:t>
-            </a:r>
-          </a:p>
-          <a:p>
-            <a:pPr>
-              <a:spcBef>
-                <a:spcPts val="500"/>
-              </a:spcBef>
-              <a:defRPr sz="1300" b="0">
-                <a:solidFill>
-                  <a:srgbClr val="333333"/>
-                </a:solidFill>
-                <a:latin typeface="Calibri"/>
-              </a:defRPr>
-            </a:pPr>
-            <a:r>
-              <a:t>Versioned releases. A change is a new version, never an edit in place</a:t>
+              <a:t>Corporate clients onboarded faster with the same team, and every ownership decision can be shown to a regulator, document by document.</a:t>
             </a:r>
           </a:p>
         </p:txBody>
@@ -6921,7 +6767,7 @@
               </a:defRPr>
             </a:pPr>
             <a:r>
-              <a:t>500,000 a day</a:t>
+              <a:t>1 million a day</a:t>
             </a:r>
           </a:p>
           <a:p>
@@ -6970,7 +6816,7 @@
               </a:defRPr>
             </a:pPr>
             <a:r>
-              <a:t>I do not build and walk away. I was resolving production issues in the document platform this month.</a:t>
+              <a:t>I do not build and walk away. I still own the document platform in production and fix any issue that comes up.</a:t>
             </a:r>
           </a:p>
         </p:txBody>

--- a/second_round/promotion_presentation_second_round.pptx
+++ b/second_round/promotion_presentation_second_round.pptx
@@ -3353,8 +3353,8 @@
         </p:nvSpPr>
         <p:spPr>
           <a:xfrm>
-            <a:off x="640080" y="960120"/>
-            <a:ext cx="5349240" cy="548640"/>
+            <a:off x="640080" y="1005840"/>
+            <a:ext cx="5349240" cy="457200"/>
           </a:xfrm>
           <a:prstGeom prst="roundRect">
             <a:avLst/>
@@ -3389,7 +3389,7 @@
               <a:spcBef>
                 <a:spcPts val="400"/>
               </a:spcBef>
-              <a:defRPr sz="1600" b="1">
+              <a:defRPr sz="1500" b="1">
                 <a:solidFill>
                   <a:srgbClr val="FFFFFF"/>
                 </a:solidFill>
@@ -3410,8 +3410,8 @@
         </p:nvSpPr>
         <p:spPr>
           <a:xfrm>
-            <a:off x="822960" y="1645920"/>
-            <a:ext cx="5029200" cy="1463040"/>
+            <a:off x="822960" y="1481328"/>
+            <a:ext cx="5029200" cy="1280160"/>
           </a:xfrm>
           <a:prstGeom prst="rect">
             <a:avLst/>
@@ -3426,9 +3426,9 @@
           <a:p>
             <a:pPr>
               <a:spcBef>
-                <a:spcPts val="800"/>
+                <a:spcPts val="600"/>
               </a:spcBef>
-              <a:defRPr sz="1500" b="0">
+              <a:defRPr sz="1400" b="0">
                 <a:solidFill>
                   <a:srgbClr val="333333"/>
                 </a:solidFill>
@@ -3442,9 +3442,9 @@
           <a:p>
             <a:pPr>
               <a:spcBef>
-                <a:spcPts val="800"/>
+                <a:spcPts val="600"/>
               </a:spcBef>
-              <a:defRPr sz="1500" b="0">
+              <a:defRPr sz="1400" b="0">
                 <a:solidFill>
                   <a:srgbClr val="333333"/>
                 </a:solidFill>
@@ -3458,9 +3458,9 @@
           <a:p>
             <a:pPr>
               <a:spcBef>
-                <a:spcPts val="800"/>
+                <a:spcPts val="600"/>
               </a:spcBef>
-              <a:defRPr sz="1500" b="0">
+              <a:defRPr sz="1400" b="0">
                 <a:solidFill>
                   <a:srgbClr val="333333"/>
                 </a:solidFill>
@@ -3481,8 +3481,8 @@
         </p:nvSpPr>
         <p:spPr>
           <a:xfrm>
-            <a:off x="6309360" y="960120"/>
-            <a:ext cx="5257800" cy="548640"/>
+            <a:off x="6309360" y="1005840"/>
+            <a:ext cx="5257800" cy="457200"/>
           </a:xfrm>
           <a:prstGeom prst="roundRect">
             <a:avLst/>
@@ -3517,7 +3517,7 @@
               <a:spcBef>
                 <a:spcPts val="400"/>
               </a:spcBef>
-              <a:defRPr sz="1600" b="1">
+              <a:defRPr sz="1500" b="1">
                 <a:solidFill>
                   <a:srgbClr val="FFFFFF"/>
                 </a:solidFill>
@@ -3538,8 +3538,8 @@
         </p:nvSpPr>
         <p:spPr>
           <a:xfrm>
-            <a:off x="6492240" y="1645920"/>
-            <a:ext cx="4937760" cy="1463040"/>
+            <a:off x="6492240" y="1481328"/>
+            <a:ext cx="4937760" cy="1280160"/>
           </a:xfrm>
           <a:prstGeom prst="rect">
             <a:avLst/>
@@ -3554,9 +3554,9 @@
           <a:p>
             <a:pPr>
               <a:spcBef>
-                <a:spcPts val="800"/>
+                <a:spcPts val="600"/>
               </a:spcBef>
-              <a:defRPr sz="1500" b="0">
+              <a:defRPr sz="1400" b="0">
                 <a:solidFill>
                   <a:srgbClr val="333333"/>
                 </a:solidFill>
@@ -3570,9 +3570,9 @@
           <a:p>
             <a:pPr>
               <a:spcBef>
-                <a:spcPts val="800"/>
+                <a:spcPts val="600"/>
               </a:spcBef>
-              <a:defRPr sz="1500" b="0">
+              <a:defRPr sz="1400" b="0">
                 <a:solidFill>
                   <a:srgbClr val="333333"/>
                 </a:solidFill>
@@ -3586,9 +3586,9 @@
           <a:p>
             <a:pPr>
               <a:spcBef>
-                <a:spcPts val="800"/>
+                <a:spcPts val="600"/>
               </a:spcBef>
-              <a:defRPr sz="1500" b="0">
+              <a:defRPr sz="1400" b="0">
                 <a:solidFill>
                   <a:srgbClr val="333333"/>
                 </a:solidFill>
@@ -3609,8 +3609,101 @@
         </p:nvSpPr>
         <p:spPr>
           <a:xfrm>
-            <a:off x="640080" y="3246120"/>
-            <a:ext cx="10927080" cy="777240"/>
+            <a:off x="640080" y="2880360"/>
+            <a:ext cx="10927080" cy="457200"/>
+          </a:xfrm>
+          <a:prstGeom prst="roundRect">
+            <a:avLst/>
+          </a:prstGeom>
+          <a:solidFill>
+            <a:srgbClr val="001E96"/>
+          </a:solidFill>
+          <a:ln>
+            <a:noFill/>
+          </a:ln>
+          <a:effectLst/>
+        </p:spPr>
+        <p:style>
+          <a:lnRef idx="1">
+            <a:schemeClr val="accent1"/>
+          </a:lnRef>
+          <a:fillRef idx="3">
+            <a:schemeClr val="accent1"/>
+          </a:fillRef>
+          <a:effectRef idx="2">
+            <a:schemeClr val="accent1"/>
+          </a:effectRef>
+          <a:fontRef idx="minor">
+            <a:schemeClr val="lt1"/>
+          </a:fontRef>
+        </p:style>
+        <p:txBody>
+          <a:bodyPr rtlCol="0" anchor="ctr" wrap="square"/>
+          <a:lstStyle/>
+          <a:p>
+            <a:pPr algn="ctr">
+              <a:spcBef>
+                <a:spcPts val="400"/>
+              </a:spcBef>
+              <a:defRPr sz="1500" b="1">
+                <a:solidFill>
+                  <a:srgbClr val="FFFFFF"/>
+                </a:solidFill>
+                <a:latin typeface="Calibri"/>
+              </a:defRPr>
+            </a:pPr>
+            <a:r>
+              <a:t>My Platform</a:t>
+            </a:r>
+          </a:p>
+        </p:txBody>
+      </p:sp>
+      <p:sp>
+        <p:nvSpPr>
+          <p:cNvPr id="8" name="TextBox 7"/>
+          <p:cNvSpPr txBox="1"/>
+          <p:nvPr/>
+        </p:nvSpPr>
+        <p:spPr>
+          <a:xfrm>
+            <a:off x="640080" y="3383280"/>
+            <a:ext cx="10927080" cy="411480"/>
+          </a:xfrm>
+          <a:prstGeom prst="rect">
+            <a:avLst/>
+          </a:prstGeom>
+          <a:noFill/>
+        </p:spPr>
+        <p:txBody>
+          <a:bodyPr wrap="square">
+            <a:spAutoFit/>
+          </a:bodyPr>
+          <a:lstStyle/>
+          <a:p>
+            <a:pPr algn="ctr">
+              <a:defRPr sz="1500" b="0" i="1">
+                <a:solidFill>
+                  <a:srgbClr val="333333"/>
+                </a:solidFill>
+                <a:latin typeface="Calibri"/>
+              </a:defRPr>
+            </a:pPr>
+            <a:r>
+              <a:t>Before the bank takes on a client, it must prove who owns them, who runs them, and that the paperwork stands up.</a:t>
+            </a:r>
+          </a:p>
+        </p:txBody>
+      </p:sp>
+      <p:sp>
+        <p:nvSpPr>
+          <p:cNvPr id="9" name="Rounded Rectangle 8"/>
+          <p:cNvSpPr/>
+          <p:nvPr/>
+        </p:nvSpPr>
+        <p:spPr>
+          <a:xfrm>
+            <a:off x="640080" y="3931920"/>
+            <a:ext cx="2505456" cy="1188720"/>
           </a:xfrm>
           <a:prstGeom prst="roundRect">
             <a:avLst/>
@@ -3642,38 +3735,84 @@
           <a:lstStyle/>
           <a:p>
             <a:pPr algn="ctr">
-              <a:spcBef>
-                <a:spcPts val="400"/>
-              </a:spcBef>
-              <a:defRPr sz="1600" b="1">
-                <a:solidFill>
-                  <a:srgbClr val="333333"/>
-                </a:solidFill>
-                <a:latin typeface="Calibri"/>
-              </a:defRPr>
-            </a:pPr>
-            <a:r>
-              <a:t>Before the bank can take on a client, it has to prove it knows who that client really is. Who owns them, who runs them, and whether the paperwork stands up.</a:t>
-            </a:r>
-          </a:p>
-        </p:txBody>
-      </p:sp>
-      <p:sp>
-        <p:nvSpPr>
-          <p:cNvPr id="8" name="Rounded Rectangle 7"/>
+              <a:defRPr sz="2000" b="1">
+                <a:solidFill>
+                  <a:srgbClr val="426BB4"/>
+                </a:solidFill>
+                <a:latin typeface="Calibri"/>
+              </a:defRPr>
+            </a:pPr>
+            <a:r>
+              <a:t>1</a:t>
+            </a:r>
+          </a:p>
+          <a:p>
+            <a:pPr algn="ctr">
+              <a:defRPr sz="1500" b="1">
+                <a:solidFill>
+                  <a:srgbClr val="001E96"/>
+                </a:solidFill>
+                <a:latin typeface="Calibri"/>
+              </a:defRPr>
+            </a:pPr>
+            <a:r>
+              <a:t>Document arrives</a:t>
+            </a:r>
+          </a:p>
+        </p:txBody>
+      </p:sp>
+      <p:sp>
+        <p:nvSpPr>
+          <p:cNvPr id="10" name="TextBox 9"/>
+          <p:cNvSpPr txBox="1"/>
+          <p:nvPr/>
+        </p:nvSpPr>
+        <p:spPr>
+          <a:xfrm>
+            <a:off x="640080" y="5193792"/>
+            <a:ext cx="2505456" cy="365760"/>
+          </a:xfrm>
+          <a:prstGeom prst="rect">
+            <a:avLst/>
+          </a:prstGeom>
+          <a:noFill/>
+        </p:spPr>
+        <p:txBody>
+          <a:bodyPr wrap="square">
+            <a:spAutoFit/>
+          </a:bodyPr>
+          <a:lstStyle/>
+          <a:p>
+            <a:pPr algn="ctr">
+              <a:defRPr sz="1300" b="1" i="0">
+                <a:solidFill>
+                  <a:srgbClr val="2E7D32"/>
+                </a:solidFill>
+                <a:latin typeface="Calibri"/>
+              </a:defRPr>
+            </a:pPr>
+            <a:r>
+              <a:t>Messaging I rebuilt</a:t>
+            </a:r>
+          </a:p>
+        </p:txBody>
+      </p:sp>
+      <p:sp>
+        <p:nvSpPr>
+          <p:cNvPr id="11" name="Rounded Rectangle 10"/>
           <p:cNvSpPr/>
           <p:nvPr/>
         </p:nvSpPr>
         <p:spPr>
           <a:xfrm>
-            <a:off x="676656" y="4206240"/>
-            <a:ext cx="2468880" cy="1280160"/>
+            <a:off x="3447288" y="3931920"/>
+            <a:ext cx="2505456" cy="1188720"/>
           </a:xfrm>
           <a:prstGeom prst="roundRect">
             <a:avLst/>
           </a:prstGeom>
           <a:solidFill>
-            <a:srgbClr val="F5F5F5"/>
+            <a:srgbClr val="E8ECF7"/>
           </a:solidFill>
           <a:ln>
             <a:noFill/>
@@ -3699,42 +3838,84 @@
           <a:lstStyle/>
           <a:p>
             <a:pPr algn="ctr">
-              <a:spcBef>
-                <a:spcPts val="400"/>
-              </a:spcBef>
+              <a:defRPr sz="2000" b="1">
+                <a:solidFill>
+                  <a:srgbClr val="426BB4"/>
+                </a:solidFill>
+                <a:latin typeface="Calibri"/>
+              </a:defRPr>
+            </a:pPr>
+            <a:r>
+              <a:t>2</a:t>
+            </a:r>
+          </a:p>
+          <a:p>
+            <a:pPr algn="ctr">
               <a:defRPr sz="1500" b="1">
                 <a:solidFill>
-                  <a:srgbClr val="333333"/>
-                </a:solidFill>
-                <a:latin typeface="Calibri"/>
-              </a:defRPr>
-            </a:pPr>
-            <a:r>
-              <a:t>Document</a:t>
-            </a:r>
-            <a:br/>
-            <a:r>
-              <a:t>arrives</a:t>
-            </a:r>
-          </a:p>
-        </p:txBody>
-      </p:sp>
-      <p:sp>
-        <p:nvSpPr>
-          <p:cNvPr id="9" name="Rounded Rectangle 8"/>
+                  <a:srgbClr val="001E96"/>
+                </a:solidFill>
+                <a:latin typeface="Calibri"/>
+              </a:defRPr>
+            </a:pPr>
+            <a:r>
+              <a:t>Linked to the right question</a:t>
+            </a:r>
+          </a:p>
+        </p:txBody>
+      </p:sp>
+      <p:sp>
+        <p:nvSpPr>
+          <p:cNvPr id="12" name="TextBox 11"/>
+          <p:cNvSpPr txBox="1"/>
+          <p:nvPr/>
+        </p:nvSpPr>
+        <p:spPr>
+          <a:xfrm>
+            <a:off x="3447288" y="5193792"/>
+            <a:ext cx="2505456" cy="365760"/>
+          </a:xfrm>
+          <a:prstGeom prst="rect">
+            <a:avLst/>
+          </a:prstGeom>
+          <a:noFill/>
+        </p:spPr>
+        <p:txBody>
+          <a:bodyPr wrap="square">
+            <a:spAutoFit/>
+          </a:bodyPr>
+          <a:lstStyle/>
+          <a:p>
+            <a:pPr algn="ctr">
+              <a:defRPr sz="1300" b="1" i="0">
+                <a:solidFill>
+                  <a:srgbClr val="2E7D32"/>
+                </a:solidFill>
+                <a:latin typeface="Calibri"/>
+              </a:defRPr>
+            </a:pPr>
+            <a:r>
+              <a:t>Automatic linking I built</a:t>
+            </a:r>
+          </a:p>
+        </p:txBody>
+      </p:sp>
+      <p:sp>
+        <p:nvSpPr>
+          <p:cNvPr id="13" name="Rounded Rectangle 12"/>
           <p:cNvSpPr/>
           <p:nvPr/>
         </p:nvSpPr>
         <p:spPr>
           <a:xfrm>
-            <a:off x="3465576" y="4206240"/>
-            <a:ext cx="2468880" cy="1280160"/>
+            <a:off x="6254496" y="3931920"/>
+            <a:ext cx="2505456" cy="1188720"/>
           </a:xfrm>
           <a:prstGeom prst="roundRect">
             <a:avLst/>
           </a:prstGeom>
           <a:solidFill>
-            <a:srgbClr val="F5F5F5"/>
+            <a:srgbClr val="E8ECF7"/>
           </a:solidFill>
           <a:ln>
             <a:noFill/>
@@ -3760,42 +3941,84 @@
           <a:lstStyle/>
           <a:p>
             <a:pPr algn="ctr">
-              <a:spcBef>
-                <a:spcPts val="400"/>
-              </a:spcBef>
+              <a:defRPr sz="2000" b="1">
+                <a:solidFill>
+                  <a:srgbClr val="426BB4"/>
+                </a:solidFill>
+                <a:latin typeface="Calibri"/>
+              </a:defRPr>
+            </a:pPr>
+            <a:r>
+              <a:t>3</a:t>
+            </a:r>
+          </a:p>
+          <a:p>
+            <a:pPr algn="ctr">
               <a:defRPr sz="1500" b="1">
                 <a:solidFill>
-                  <a:srgbClr val="333333"/>
-                </a:solidFill>
-                <a:latin typeface="Calibri"/>
-              </a:defRPr>
-            </a:pPr>
-            <a:r>
-              <a:t>Linked to the right</a:t>
-            </a:r>
-            <a:br/>
-            <a:r>
-              <a:t>compliance question</a:t>
-            </a:r>
-          </a:p>
-        </p:txBody>
-      </p:sp>
-      <p:sp>
-        <p:nvSpPr>
-          <p:cNvPr id="10" name="Rounded Rectangle 9"/>
+                  <a:srgbClr val="001E96"/>
+                </a:solidFill>
+                <a:latin typeface="Calibri"/>
+              </a:defRPr>
+            </a:pPr>
+            <a:r>
+              <a:t>Validity checked</a:t>
+            </a:r>
+          </a:p>
+        </p:txBody>
+      </p:sp>
+      <p:sp>
+        <p:nvSpPr>
+          <p:cNvPr id="14" name="TextBox 13"/>
+          <p:cNvSpPr txBox="1"/>
+          <p:nvPr/>
+        </p:nvSpPr>
+        <p:spPr>
+          <a:xfrm>
+            <a:off x="6254496" y="5193792"/>
+            <a:ext cx="2505456" cy="365760"/>
+          </a:xfrm>
+          <a:prstGeom prst="rect">
+            <a:avLst/>
+          </a:prstGeom>
+          <a:noFill/>
+        </p:spPr>
+        <p:txBody>
+          <a:bodyPr wrap="square">
+            <a:spAutoFit/>
+          </a:bodyPr>
+          <a:lstStyle/>
+          <a:p>
+            <a:pPr algn="ctr">
+              <a:defRPr sz="1300" b="1" i="0">
+                <a:solidFill>
+                  <a:srgbClr val="2E7D32"/>
+                </a:solidFill>
+                <a:latin typeface="Calibri"/>
+              </a:defRPr>
+            </a:pPr>
+            <a:r>
+              <a:t>State machine I built</a:t>
+            </a:r>
+          </a:p>
+        </p:txBody>
+      </p:sp>
+      <p:sp>
+        <p:nvSpPr>
+          <p:cNvPr id="15" name="Rounded Rectangle 14"/>
           <p:cNvSpPr/>
           <p:nvPr/>
         </p:nvSpPr>
         <p:spPr>
           <a:xfrm>
-            <a:off x="6254496" y="4206240"/>
-            <a:ext cx="2468880" cy="1280160"/>
+            <a:off x="9061704" y="3931920"/>
+            <a:ext cx="2505456" cy="1188720"/>
           </a:xfrm>
           <a:prstGeom prst="roundRect">
             <a:avLst/>
           </a:prstGeom>
           <a:solidFill>
-            <a:srgbClr val="F5F5F5"/>
+            <a:srgbClr val="E8ECF7"/>
           </a:solidFill>
           <a:ln>
             <a:noFill/>
@@ -3821,42 +4044,192 @@
           <a:lstStyle/>
           <a:p>
             <a:pPr algn="ctr">
-              <a:spcBef>
-                <a:spcPts val="400"/>
-              </a:spcBef>
+              <a:defRPr sz="2000" b="1">
+                <a:solidFill>
+                  <a:srgbClr val="426BB4"/>
+                </a:solidFill>
+                <a:latin typeface="Calibri"/>
+              </a:defRPr>
+            </a:pPr>
+            <a:r>
+              <a:t>4</a:t>
+            </a:r>
+          </a:p>
+          <a:p>
+            <a:pPr algn="ctr">
               <a:defRPr sz="1500" b="1">
                 <a:solidFill>
-                  <a:srgbClr val="333333"/>
-                </a:solidFill>
-                <a:latin typeface="Calibri"/>
-              </a:defRPr>
-            </a:pPr>
-            <a:r>
-              <a:t>Validity</a:t>
-            </a:r>
-            <a:br/>
-            <a:r>
-              <a:t>checked</a:t>
-            </a:r>
-          </a:p>
-        </p:txBody>
-      </p:sp>
-      <p:sp>
-        <p:nvSpPr>
-          <p:cNvPr id="11" name="Rounded Rectangle 10"/>
+                  <a:srgbClr val="001E96"/>
+                </a:solidFill>
+                <a:latin typeface="Calibri"/>
+              </a:defRPr>
+            </a:pPr>
+            <a:r>
+              <a:t>Ready for regulatory review</a:t>
+            </a:r>
+          </a:p>
+        </p:txBody>
+      </p:sp>
+      <p:sp>
+        <p:nvSpPr>
+          <p:cNvPr id="16" name="TextBox 15"/>
+          <p:cNvSpPr txBox="1"/>
+          <p:nvPr/>
+        </p:nvSpPr>
+        <p:spPr>
+          <a:xfrm>
+            <a:off x="9061704" y="5193792"/>
+            <a:ext cx="2505456" cy="365760"/>
+          </a:xfrm>
+          <a:prstGeom prst="rect">
+            <a:avLst/>
+          </a:prstGeom>
+          <a:noFill/>
+        </p:spPr>
+        <p:txBody>
+          <a:bodyPr wrap="square">
+            <a:spAutoFit/>
+          </a:bodyPr>
+          <a:lstStyle/>
+          <a:p>
+            <a:pPr algn="ctr">
+              <a:defRPr sz="1300" b="1" i="0">
+                <a:solidFill>
+                  <a:srgbClr val="2E7D32"/>
+                </a:solidFill>
+                <a:latin typeface="Calibri"/>
+              </a:defRPr>
+            </a:pPr>
+            <a:r>
+              <a:t>Automatic unlinking I built</a:t>
+            </a:r>
+          </a:p>
+        </p:txBody>
+      </p:sp>
+      <p:sp>
+        <p:nvSpPr>
+          <p:cNvPr id="17" name="TextBox 16"/>
+          <p:cNvSpPr txBox="1"/>
+          <p:nvPr/>
+        </p:nvSpPr>
+        <p:spPr>
+          <a:xfrm>
+            <a:off x="3145536" y="4297680"/>
+            <a:ext cx="301752" cy="457200"/>
+          </a:xfrm>
+          <a:prstGeom prst="rect">
+            <a:avLst/>
+          </a:prstGeom>
+          <a:noFill/>
+        </p:spPr>
+        <p:txBody>
+          <a:bodyPr wrap="square">
+            <a:spAutoFit/>
+          </a:bodyPr>
+          <a:lstStyle/>
+          <a:p>
+            <a:pPr algn="ctr">
+              <a:defRPr sz="2200" b="1" i="0">
+                <a:solidFill>
+                  <a:srgbClr val="426BB4"/>
+                </a:solidFill>
+                <a:latin typeface="Calibri"/>
+              </a:defRPr>
+            </a:pPr>
+            <a:r>
+              <a:t>→</a:t>
+            </a:r>
+          </a:p>
+        </p:txBody>
+      </p:sp>
+      <p:sp>
+        <p:nvSpPr>
+          <p:cNvPr id="18" name="TextBox 17"/>
+          <p:cNvSpPr txBox="1"/>
+          <p:nvPr/>
+        </p:nvSpPr>
+        <p:spPr>
+          <a:xfrm>
+            <a:off x="5952744" y="4297680"/>
+            <a:ext cx="301752" cy="457200"/>
+          </a:xfrm>
+          <a:prstGeom prst="rect">
+            <a:avLst/>
+          </a:prstGeom>
+          <a:noFill/>
+        </p:spPr>
+        <p:txBody>
+          <a:bodyPr wrap="square">
+            <a:spAutoFit/>
+          </a:bodyPr>
+          <a:lstStyle/>
+          <a:p>
+            <a:pPr algn="ctr">
+              <a:defRPr sz="2200" b="1" i="0">
+                <a:solidFill>
+                  <a:srgbClr val="426BB4"/>
+                </a:solidFill>
+                <a:latin typeface="Calibri"/>
+              </a:defRPr>
+            </a:pPr>
+            <a:r>
+              <a:t>→</a:t>
+            </a:r>
+          </a:p>
+        </p:txBody>
+      </p:sp>
+      <p:sp>
+        <p:nvSpPr>
+          <p:cNvPr id="19" name="TextBox 18"/>
+          <p:cNvSpPr txBox="1"/>
+          <p:nvPr/>
+        </p:nvSpPr>
+        <p:spPr>
+          <a:xfrm>
+            <a:off x="8759952" y="4297680"/>
+            <a:ext cx="301752" cy="457200"/>
+          </a:xfrm>
+          <a:prstGeom prst="rect">
+            <a:avLst/>
+          </a:prstGeom>
+          <a:noFill/>
+        </p:spPr>
+        <p:txBody>
+          <a:bodyPr wrap="square">
+            <a:spAutoFit/>
+          </a:bodyPr>
+          <a:lstStyle/>
+          <a:p>
+            <a:pPr algn="ctr">
+              <a:defRPr sz="2200" b="1" i="0">
+                <a:solidFill>
+                  <a:srgbClr val="426BB4"/>
+                </a:solidFill>
+                <a:latin typeface="Calibri"/>
+              </a:defRPr>
+            </a:pPr>
+            <a:r>
+              <a:t>→</a:t>
+            </a:r>
+          </a:p>
+        </p:txBody>
+      </p:sp>
+      <p:sp>
+        <p:nvSpPr>
+          <p:cNvPr id="20" name="Rounded Rectangle 19"/>
           <p:cNvSpPr/>
           <p:nvPr/>
         </p:nvSpPr>
         <p:spPr>
           <a:xfrm>
-            <a:off x="9043416" y="4206240"/>
-            <a:ext cx="2468880" cy="1280160"/>
+            <a:off x="640080" y="5669280"/>
+            <a:ext cx="10927080" cy="548640"/>
           </a:xfrm>
           <a:prstGeom prst="roundRect">
             <a:avLst/>
           </a:prstGeom>
           <a:solidFill>
-            <a:srgbClr val="F5F5F5"/>
+            <a:srgbClr val="426BB4"/>
           </a:solidFill>
           <a:ln>
             <a:noFill/>
@@ -3887,161 +4260,13 @@
               </a:spcBef>
               <a:defRPr sz="1500" b="1">
                 <a:solidFill>
-                  <a:srgbClr val="333333"/>
-                </a:solidFill>
-                <a:latin typeface="Calibri"/>
-              </a:defRPr>
-            </a:pPr>
-            <a:r>
-              <a:t>Ready for</a:t>
-            </a:r>
-            <a:br/>
-            <a:r>
-              <a:t>regulatory review</a:t>
-            </a:r>
-          </a:p>
-        </p:txBody>
-      </p:sp>
-      <p:sp>
-        <p:nvSpPr>
-          <p:cNvPr id="12" name="TextBox 11"/>
-          <p:cNvSpPr txBox="1"/>
-          <p:nvPr/>
-        </p:nvSpPr>
-        <p:spPr>
-          <a:xfrm>
-            <a:off x="3145536" y="4553712"/>
-            <a:ext cx="320040" cy="548640"/>
-          </a:xfrm>
-          <a:prstGeom prst="rect">
-            <a:avLst/>
-          </a:prstGeom>
-          <a:noFill/>
-        </p:spPr>
-        <p:txBody>
-          <a:bodyPr wrap="square">
-            <a:spAutoFit/>
-          </a:bodyPr>
-          <a:lstStyle/>
-          <a:p>
-            <a:pPr algn="ctr">
-              <a:defRPr sz="2200" b="1" i="0">
-                <a:solidFill>
-                  <a:srgbClr val="426BB4"/>
-                </a:solidFill>
-                <a:latin typeface="Calibri"/>
-              </a:defRPr>
-            </a:pPr>
-            <a:r>
-              <a:t>→</a:t>
-            </a:r>
-          </a:p>
-        </p:txBody>
-      </p:sp>
-      <p:sp>
-        <p:nvSpPr>
-          <p:cNvPr id="13" name="TextBox 12"/>
-          <p:cNvSpPr txBox="1"/>
-          <p:nvPr/>
-        </p:nvSpPr>
-        <p:spPr>
-          <a:xfrm>
-            <a:off x="5934456" y="4553712"/>
-            <a:ext cx="320040" cy="548640"/>
-          </a:xfrm>
-          <a:prstGeom prst="rect">
-            <a:avLst/>
-          </a:prstGeom>
-          <a:noFill/>
-        </p:spPr>
-        <p:txBody>
-          <a:bodyPr wrap="square">
-            <a:spAutoFit/>
-          </a:bodyPr>
-          <a:lstStyle/>
-          <a:p>
-            <a:pPr algn="ctr">
-              <a:defRPr sz="2200" b="1" i="0">
-                <a:solidFill>
-                  <a:srgbClr val="426BB4"/>
-                </a:solidFill>
-                <a:latin typeface="Calibri"/>
-              </a:defRPr>
-            </a:pPr>
-            <a:r>
-              <a:t>→</a:t>
-            </a:r>
-          </a:p>
-        </p:txBody>
-      </p:sp>
-      <p:sp>
-        <p:nvSpPr>
-          <p:cNvPr id="14" name="TextBox 13"/>
-          <p:cNvSpPr txBox="1"/>
-          <p:nvPr/>
-        </p:nvSpPr>
-        <p:spPr>
-          <a:xfrm>
-            <a:off x="8723376" y="4553712"/>
-            <a:ext cx="320040" cy="548640"/>
-          </a:xfrm>
-          <a:prstGeom prst="rect">
-            <a:avLst/>
-          </a:prstGeom>
-          <a:noFill/>
-        </p:spPr>
-        <p:txBody>
-          <a:bodyPr wrap="square">
-            <a:spAutoFit/>
-          </a:bodyPr>
-          <a:lstStyle/>
-          <a:p>
-            <a:pPr algn="ctr">
-              <a:defRPr sz="2200" b="1" i="0">
-                <a:solidFill>
-                  <a:srgbClr val="426BB4"/>
-                </a:solidFill>
-                <a:latin typeface="Calibri"/>
-              </a:defRPr>
-            </a:pPr>
-            <a:r>
-              <a:t>→</a:t>
-            </a:r>
-          </a:p>
-        </p:txBody>
-      </p:sp>
-      <p:sp>
-        <p:nvSpPr>
-          <p:cNvPr id="15" name="TextBox 14"/>
-          <p:cNvSpPr txBox="1"/>
-          <p:nvPr/>
-        </p:nvSpPr>
-        <p:spPr>
-          <a:xfrm>
-            <a:off x="640080" y="5760720"/>
-            <a:ext cx="10927080" cy="548640"/>
-          </a:xfrm>
-          <a:prstGeom prst="rect">
-            <a:avLst/>
-          </a:prstGeom>
-          <a:noFill/>
-        </p:spPr>
-        <p:txBody>
-          <a:bodyPr wrap="square">
-            <a:spAutoFit/>
-          </a:bodyPr>
-          <a:lstStyle/>
-          <a:p>
-            <a:pPr algn="l">
-              <a:defRPr sz="1500" b="0" i="1">
-                <a:solidFill>
-                  <a:srgbClr val="426BB4"/>
-                </a:solidFill>
-                <a:latin typeface="Calibri"/>
-              </a:defRPr>
-            </a:pPr>
-            <a:r>
-              <a:t>My work spans the full pipeline, and now the AI that reads the documents.</a:t>
+                  <a:srgbClr val="FFFFFF"/>
+                </a:solidFill>
+                <a:latin typeface="Calibri"/>
+              </a:defRPr>
+            </a:pPr>
+            <a:r>
+              <a:t>And now AI agents read the documents, on Nexus AI, the framework I built</a:t>
             </a:r>
           </a:p>
         </p:txBody>
